--- a/presentation/Final_Project_Presentation.pptx
+++ b/presentation/Final_Project_Presentation.pptx
@@ -3357,7 +3357,7 @@
                   <a:srgbClr val="2196F3"/>
                 </a:solidFill>
               </a:rPr>
-              <a:t>Student: [Your Name] | October 2026</a:t>
+              <a:t>Student: Tushar Marathe | Organization: Internova | October 2026</a:t>
             </a:r>
           </a:p>
         </p:txBody>
